--- a/public/fun/pack/pptx/weddingpro/결혼식프리미엄_50_감사·답례중심_골든레드.pptx
+++ b/public/fun/pack/pptx/weddingpro/결혼식프리미엄_50_감사·답례중심_골든레드.pptx
@@ -113,12 +113,12 @@
   <p:extLst>
     <p:ext uri="{521415D9-36F7-43E2-AB2F-B90AF26B5E84}">
       <p14:sectionLst xmlns:p14="http://schemas.microsoft.com/office/powerpoint/2010/main">
-        <p14:section name="시작" id="{E140AD7C-B9F9-4EFE-A6AC-9C7EE689B305}">
+        <p14:section name="시작" id="{59497799-E5B3-486C-9F84-0628945AAA8C}">
           <p14:sldIdLst>
             <p14:sldId id="256"/>
           </p14:sldIdLst>
         </p14:section>
-        <p14:section name="본문" id="{F7F496FB-6DBF-4151-9D27-665C70977112}">
+        <p14:section name="본문" id="{2A29FE96-8FB7-4F88-BB2D-CC398080C35D}">
           <p14:sldIdLst>
             <p14:sldId id="257"/>
             <p14:sldId id="258"/>
@@ -127,7 +127,7 @@
             <p14:sldId id="261"/>
           </p14:sldIdLst>
         </p14:section>
-        <p14:section name="마무리" id="{06EA2A2C-5024-4BDF-82BE-1A38783858C2}">
+        <p14:section name="마무리" id="{12C4E107-584C-4081-94C3-0B8AF6DE1B4C}">
           <p14:sldIdLst>
             <p14:sldId id="262"/>
           </p14:sldIdLst>
@@ -1965,7 +1965,7 @@
             </a:lvl1pPr>
           </a:lstStyle>
           <a:p>
-            <a:fld id="{16FE59FA-6FD2-437A-B846-42790D1FB965}" type="slidenum">
+            <a:fld id="{440DB598-0ECD-463C-91D6-F990FA36CE60}" type="slidenum">
               <a:rPr lang="en-US"/>
               <a:t>‹#›</a:t>
             </a:fld>
@@ -3400,7 +3400,7 @@
             </a:lvl1pPr>
           </a:lstStyle>
           <a:p>
-            <a:fld id="{CE0867C8-87BE-4E8E-92D7-F2D966224488}" type="slidenum">
+            <a:fld id="{6EAD080D-DB7F-492C-BAD4-D9C412E1EB24}" type="slidenum">
               <a:rPr lang="en-US"/>
               <a:t>‹#›</a:t>
             </a:fld>
@@ -4410,7 +4410,7 @@
             </a:lvl1pPr>
           </a:lstStyle>
           <a:p>
-            <a:fld id="{BC4D2A7E-B3AF-4180-BF80-1D0FAE50A2AB}" type="slidenum">
+            <a:fld id="{AC67D8FD-E340-4555-8CB7-5B3587972848}" type="slidenum">
               <a:rPr lang="en-US"/>
               <a:t>‹#›</a:t>
             </a:fld>
@@ -5579,7 +5579,7 @@
           <a:p>
             <a:r>
               <a:rPr lang="ko-KR"/>
-              <a:t>0000. 00. 00 · 예식장 이름</a:t>
+              <a:t>날짜 입력 · 예식장 이름</a:t>
             </a:r>
           </a:p>
         </p:txBody>
@@ -5800,7 +5800,7 @@
           <a:bodyPr/>
           <a:lstStyle/>
           <a:p>
-            <a:fld id="{16861F35-9BAE-494A-AFAB-7DA1482CB884}" type="slidenum">
+            <a:fld id="{4CB0D2CF-6BCA-4BA0-90FC-E0E1E2BF1820}" type="slidenum">
               <a:rPr lang="en-US"/>
               <a:t>‹#›</a:t>
             </a:fld>
@@ -6202,7 +6202,7 @@
           <a:bodyPr/>
           <a:lstStyle/>
           <a:p>
-            <a:fld id="{55B1BAAE-0029-4686-9901-C798C9D675B3}" type="slidenum">
+            <a:fld id="{79CA4DF3-A8D8-46D2-8AA5-524C052E40D7}" type="slidenum">
               <a:rPr lang="en-US"/>
               <a:t>‹#›</a:t>
             </a:fld>
@@ -6547,7 +6547,7 @@
           <a:bodyPr/>
           <a:lstStyle/>
           <a:p>
-            <a:fld id="{AB9375CD-174A-4305-B456-879B5196E75F}" type="slidenum">
+            <a:fld id="{795BEC9C-777A-434E-8CF5-1A4D287D12D6}" type="slidenum">
               <a:rPr lang="en-US"/>
               <a:t>‹#›</a:t>
             </a:fld>
@@ -7814,7 +7814,7 @@
           <a:bodyPr/>
           <a:lstStyle/>
           <a:p>
-            <a:fld id="{7D135CD6-3118-4048-BEC8-69AEB6F66E7B}" type="slidenum">
+            <a:fld id="{FE1E0A86-8D19-491F-94FE-C54CC9A6C397}" type="slidenum">
               <a:rPr lang="en-US"/>
               <a:t>‹#›</a:t>
             </a:fld>
@@ -7902,7 +7902,7 @@
           <a:bodyPr/>
           <a:lstStyle/>
           <a:p>
-            <a:fld id="{F74045A9-74C4-4196-8AB3-1D06E7A45914}" type="slidenum">
+            <a:fld id="{96156190-C090-48C8-85AF-0DBFF2EDB349}" type="slidenum">
               <a:rPr lang="en-US"/>
               <a:t>‹#›</a:t>
             </a:fld>
